--- a/presentation_slides.pptx
+++ b/presentation_slides.pptx
@@ -5828,7 +5828,7 @@
                         </a:defRPr>
                       </a:pPr>
                       <a:r>
-                        <a:t>0.861</a:t>
+                        <a:t>0.952</a:t>
                       </a:r>
                     </a:p>
                   </a:txBody>
@@ -5852,7 +5852,7 @@
                         </a:defRPr>
                       </a:pPr>
                       <a:r>
-                        <a:t>0.849</a:t>
+                        <a:t>0.928</a:t>
                       </a:r>
                     </a:p>
                   </a:txBody>
